--- a/powerpoint/Session2.pptx
+++ b/powerpoint/Session2.pptx
@@ -224,7 +224,7 @@
           <a:p>
             <a:fld id="{76288271-110E-284E-BDF5-E46245F1FF69}" type="datetimeFigureOut">
               <a:rPr lang="en-US" smtClean="0"/>
-              <a:t>2/1/26</a:t>
+              <a:t>5/1/26</a:t>
             </a:fld>
             <a:endParaRPr lang="en-US"/>
           </a:p>
@@ -4556,7 +4556,7 @@
           <a:p>
             <a:fld id="{AF87509E-A8CC-7D4A-9558-F93678A4FBA3}" type="datetimeFigureOut">
               <a:rPr lang="en-US" smtClean="0"/>
-              <a:t>2/1/26</a:t>
+              <a:t>5/1/26</a:t>
             </a:fld>
             <a:endParaRPr lang="en-US"/>
           </a:p>
@@ -12906,7 +12906,7 @@
                 <a:latin typeface="Calibri"/>
                 <a:ea typeface="DejaVu Sans"/>
               </a:rPr>
-              <a:t>Hilary 2026</a:t>
+              <a:t>Trinity 2026</a:t>
             </a:r>
             <a:endParaRPr lang="en-GB" sz="3200" b="0" strike="noStrike" spc="-1" dirty="0">
               <a:latin typeface="Arial"/>
@@ -18915,7 +18915,7 @@
                 <a:latin typeface="Calibri"/>
                 <a:ea typeface="DejaVu Sans"/>
               </a:rPr>
-              <a:t>Hilary 2026</a:t>
+              <a:t>Trinity 2026</a:t>
             </a:r>
             <a:endParaRPr lang="en-GB" sz="3200" b="0" strike="noStrike" spc="-1" dirty="0">
               <a:latin typeface="Arial"/>
